--- a/slides/guidance.pptx
+++ b/slides/guidance.pptx
@@ -131,7 +131,7 @@
   <p:extLst>
     <p:ext uri="{521415D9-36F7-43E2-AB2F-B90AF26B5E84}">
       <p14:sectionLst xmlns:p14="http://schemas.microsoft.com/office/powerpoint/2010/main">
-        <p14:section name="はじめに" id="{5a07560d-d80d-b30d-367d-34c82a586a43}">
+        <p14:section name="はじめに" id="{b8a5409a-0b77-f427-226a-ca8007784891}">
           <p14:sldIdLst>
             <p14:sldId id="256"/>
             <p14:sldId id="257"/>
@@ -139,27 +139,27 @@
             <p14:sldId id="259"/>
           </p14:sldIdLst>
         </p14:section>
-        <p14:section name="全体像" id="{521b44e4-ee8f-7b31-d89f-bfa381493d20}">
+        <p14:section name="全体像" id="{544afe39-d1d8-e024-e111-2f302b8de81c}">
           <p14:sldIdLst>
             <p14:sldId id="260"/>
             <p14:sldId id="261"/>
             <p14:sldId id="262"/>
           </p14:sldIdLst>
         </p14:section>
-        <p14:section name="Phase 1" id="{577b2a00-f739-15f1-98b4-302b8b26e803}">
+        <p14:section name="Phase 1" id="{d4c0a604-3ba6-31bc-e110-0e6efbcc3d7e}">
           <p14:sldIdLst>
             <p14:sldId id="263"/>
             <p14:sldId id="264"/>
           </p14:sldIdLst>
         </p14:section>
-        <p14:section name="Phase 2" id="{85a25228-cff5-60f3-1574-26e9ed9d92a4}">
+        <p14:section name="Phase 2" id="{bd48c7bc-4be1-217e-5535-1ac942f61ec5}">
           <p14:sldIdLst>
             <p14:sldId id="265"/>
             <p14:sldId id="266"/>
             <p14:sldId id="267"/>
           </p14:sldIdLst>
         </p14:section>
-        <p14:section name="Phase 3" id="{80e43e3c-b6d0-f49d-8834-1626f164cbfb}">
+        <p14:section name="Phase 3" id="{accc44ea-212f-498d-639b-ddc4496e69a6}">
           <p14:sldIdLst>
             <p14:sldId id="268"/>
             <p14:sldId id="269"/>
@@ -167,7 +167,7 @@
             <p14:sldId id="271"/>
           </p14:sldIdLst>
         </p14:section>
-        <p14:section name="Phase 4" id="{abcd86a5-f089-717e-20e2-cf5c84cceae5}">
+        <p14:section name="Phase 4" id="{e27f6a12-5bdc-865d-c2cf-6941a2060327}">
           <p14:sldIdLst>
             <p14:sldId id="272"/>
             <p14:sldId id="273"/>
@@ -176,13 +176,13 @@
             <p14:sldId id="276"/>
           </p14:sldIdLst>
         </p14:section>
-        <p14:section name="Phase 5・発展編" id="{e5451436-b2ee-236e-7ef4-1c4d434f8c6d}">
+        <p14:section name="Phase 5・発展編" id="{6d4e5775-775a-6660-0ad5-3fbaa2968456}">
           <p14:sldIdLst>
             <p14:sldId id="277"/>
             <p14:sldId id="278"/>
           </p14:sldIdLst>
         </p14:section>
-        <p14:section name="おわりに" id="{138641cf-6729-6092-b51d-777d5df0b8d8}">
+        <p14:section name="おわりに" id="{706980d5-2b49-56ee-4f53-7a9c72ef7f1c}">
           <p14:sldIdLst>
             <p14:sldId id="279"/>
             <p14:sldId id="280"/>
@@ -592,7 +592,9 @@
           <a:p>
             <a:r>
               <a:rPr lang="en-US" dirty="0"/>
-              <a:t/>
+              <a:t>みなさん、こんにちは。この授業「ウェブフロントエンド」のガイダンスを始めます。
+この授業では、ネクストジェイエスを使ってリアクトを学び直すところから始めて、テスト、ギットハブアクションズ、シーアイシーディー、そしてデプロイまでを一通り体験します。
+リアクトはもう少し触ったことがあると思うので、まずは復習から入ります。今日は、これから半年で何を学ぶのか、全体の地図をつかんでください。</a:t>
             </a:r>
             <a:endParaRPr lang="en-US" dirty="0"/>
           </a:p>
@@ -680,7 +682,12 @@
           <a:p>
             <a:r>
               <a:rPr lang="en-US" dirty="0"/>
-              <a:t/>
+              <a:t>フェーズ2はテストです。そもそも、なぜテストを書くのでしょうか。
+画面を手で触って確かめるのは、毎回やると大変で、見落としも出ます。
+一か所直したら、別の場所が壊れてしまうことがあります。テストがあれば、すぐに気づけます。
+そして、テストがあれば、フェーズ3で、ギットハブアクションズに毎回自動で確かめてもらえます。
+右の図は、テストの種類です。一番下の単体テストは、関数一つ、部品一つを確かめます。真ん中の結合テストは、部品を組み合わせて確かめます。一番上のイーツーイーテストは、ブラウザで最初から最後まで操作します。
+下ほど速くてたくさん書けて、上ほど本物に近いけれど遅い、という関係です。本編では単体テストと結合テストを中心に学びます。</a:t>
             </a:r>
             <a:endParaRPr lang="en-US" dirty="0"/>
           </a:p>
@@ -768,7 +775,12 @@
           <a:p>
             <a:r>
               <a:rPr lang="en-US" dirty="0"/>
-              <a:t/>
+              <a:t>フェーズ2の六コマで、やることです。
+コマ8でジェストを導入して、最初のテストを動かします。
+コマ9では、トゥードゥーの追加や削除を、純粋関数として切り出してテストします。純粋関数とは、同じ入力なら必ず同じ出力を返す関数のことです。
+コマ10と11では、リアクト・テスティング・ライブラリーで、画面の表示と、クリックや入力などの操作をテストします。
+コマ12では、通信やページ移動を偽物に置き換える、モックを学びます。
+コマ13では、カバレッジを測って、テストされていない場所を見つけます。</a:t>
             </a:r>
             <a:endParaRPr lang="en-US" dirty="0"/>
           </a:p>
@@ -856,7 +868,12 @@
           <a:p>
             <a:r>
               <a:rPr lang="en-US" dirty="0"/>
-              <a:t/>
+              <a:t>フェーズ2の用語です。
+ジェストは略語ではなく、英語で「冗談、おふざけ」という意味です。楽しくテストを書こう、という思いが込められています。
+アールティーエルは、リアクト・テスティング・ライブラリーの略です。ライブラリーは図書館のことで、プログラムでは便利な部品を集めたもの、という意味になります。
+ドムは、ドキュメント・オブジェクト・モデル。エイチティーエムエルを、ジャバスクリプトから操作できる木の形のデータです。ジェイエスドムは、ジャバスクリプトで作った、にせもののブラウザです。
+イーツーイーは、エンド・トゥー・エンド、端から端まで、という意味です。
+モックは「模造品」、カバレッジは「覆う範囲」という意味です。</a:t>
             </a:r>
             <a:endParaRPr lang="en-US" dirty="0"/>
           </a:p>
@@ -944,7 +961,12 @@
           <a:p>
             <a:r>
               <a:rPr lang="en-US" dirty="0"/>
-              <a:t/>
+              <a:t>フェーズ3は、ギットハブアクションズです。自動チェックのしくみを見てみましょう。
+まず、プルリクエストを出したり、メインにプッシュしたりすることが、きっかけ、つまりイベントになります。
+イベントが起きると、ワークフローが動きます。ワークフローの中には、リント、テスト、ビルドといったジョブがあり、それぞれのジョブは、いくつかのステップでできています。
+ジョブは、ランナーと呼ばれる、ギットハブが毎回用意する使い捨てのマシンで動きます。
+右側が、実際に書くワークフローのファイルです。ヤムルという形式で、いつ動くか、どのマシンで動くか、どんな手順で動くかを書きます。
+結果は、プルリクエストに、成功ならチェックマーク、失敗ならバツ印で表示されます。</a:t>
             </a:r>
             <a:endParaRPr lang="en-US" dirty="0"/>
           </a:p>
@@ -1032,7 +1054,12 @@
           <a:p>
             <a:r>
               <a:rPr lang="en-US" dirty="0"/>
-              <a:t/>
+              <a:t>フェーズ3の六コマで、やることです。
+コマ14で、ワークフロー、ジョブ、ステップの関係と、ヤムルの書き方を学びます。
+コマ15で、はじめてのワークフローを動かし、ログを読みます。
+コマ16と17で、リント、ビルド、テストを自動で実行するようにします。
+コマ18では、ルールセットを使って、メインを守ります。シーアイは失敗を知らせるだけなので、ルールセットで、失敗したものをマージできないように止めるのがポイントです。
+コマ19では、シークレッツと環境変数を学びます。ネクスト・パブリックが付いた変数はブラウザから見えてしまう、という注意点も押さえます。</a:t>
             </a:r>
             <a:endParaRPr lang="en-US" dirty="0"/>
           </a:p>
@@ -1120,7 +1147,12 @@
           <a:p>
             <a:r>
               <a:rPr lang="en-US" dirty="0"/>
-              <a:t/>
+              <a:t>フェーズ3の用語、一つ目です。
+ヤムルは、もともと、イエット・アナザー・マークアップ・ランゲージ、「また別のマークアップ言語」の略でした。のちに、ヤムル・エイント・マークアップ・ランゲージ、「ヤムルはマークアップ言語じゃない」に変わりました。自分の名前を中に含む、ちょっと面白い略語です。
+リントは、服につく「糸くず」のことです。千九百七十八年に、ベル研究所が、シー言語の細かい問題を拾うツールに、糸くず取りという意味でこの名前を付けました。
+イーエスリントは、ジャバスクリプトの標準仕様であるエクマスクリプトと、リントを合わせた名前です。
+ビルドは「組み立てる」。
+エヌピーエム・シーアイのシーアイは、クリーン・インストール、まっさらな状態からインストールする、という意味です。</a:t>
             </a:r>
             <a:endParaRPr lang="en-US" dirty="0"/>
           </a:p>
@@ -1208,7 +1240,13 @@
           <a:p>
             <a:r>
               <a:rPr lang="en-US" dirty="0"/>
-              <a:t/>
+              <a:t>フェーズ3の用語、二つ目です。
+ワークフローは、仕事の流れ。ジョブはひとまとまりの仕事、ステップは手順の一段です。
+ランナーは、走らせるもの、つまりジョブを実行するマシンです。
+チェックアウトは、図書館で本を借り出す、という意味です。リポジトリのコードを、ランナーに取り出します。
+ルールセットは、規則のひとそろい。メインを守るためのルールです。
+シークレッツは「秘密」。パスワードなどを、安全にワークフローへ渡します。
+ネクスト・パブリックのパブリックは「公開」。この名前で始まる環境変数は、ブラウザから誰でも見られるので、秘密の値には使いません。</a:t>
             </a:r>
             <a:endParaRPr lang="en-US" dirty="0"/>
           </a:p>
@@ -1296,7 +1334,11 @@
           <a:p>
             <a:r>
               <a:rPr lang="en-US" dirty="0"/>
-              <a:t/>
+              <a:t>フェーズ4は、シーアイシーディーとデプロイです。まず、どこに公開するかを考えます。
+公開先には、大きく二種類あります。できあがったファイルを置くだけの、静的ホスティングと、アクセスのたびにサーバでプログラムを動かせるホスティングです。
+ギットハブページズは静的ホスティングです。無料で、ギットハブの中で完結しますが、サーバの機能は使えません。
+バーセルは、ネクストジェイエスを開発している会社のサービスで、サーバの機能も動きます。プルリクエストごとにプレビューのユーアールエルができるのも便利です。
+この授業では両方に公開して、違いを体験します。</a:t>
             </a:r>
             <a:endParaRPr lang="en-US" dirty="0"/>
           </a:p>
@@ -1384,7 +1426,11 @@
           <a:p>
             <a:r>
               <a:rPr lang="en-US" dirty="0"/>
-              <a:t/>
+              <a:t>フェーズ4で完成させる、パイプラインの全体像です。
+上の段は、プルリクエストを出したときの流れです。リントとテスト、ビルドで検査をして、レビューをしてからマージします。ここでは検査だけで、公開はしません。
+下の段は、メインにマージされたときの流れです。同じように検査をして、通ったらギットハブページズ用のビルドをして、自動で公開します。
+どこかで失敗したら、その先には進みません。公開したあとに問題が見つかったら、ギット・リバートで元に戻します。
+この一本のパイプラインを、自分の手で作り上げるのが、フェーズ4のゴールです。</a:t>
             </a:r>
             <a:endParaRPr lang="en-US" dirty="0"/>
           </a:p>
@@ -1472,7 +1518,12 @@
           <a:p>
             <a:r>
               <a:rPr lang="en-US" dirty="0"/>
-              <a:t/>
+              <a:t>フェーズ4の六コマで、やることです。
+コマ20で、公開先を比べて選びます。
+コマ21でバーセルに、コマ22でギットハブページズに公開します。
+コマ23で、シーアイとデプロイを一本のパイプラインにまとめます。
+コマ24は、トラブルシューティングの演習です。手元では通るのにシーアイで落ちる、という典型的な原因を学びます。
+コマ25では、チーム開発を体験します。イシューを分担して開発し、お互いにレビューし合い、コンフリクトを相談して解決します。</a:t>
             </a:r>
             <a:endParaRPr lang="en-US" dirty="0"/>
           </a:p>
@@ -1560,7 +1611,13 @@
           <a:p>
             <a:r>
               <a:rPr lang="en-US" dirty="0"/>
-              <a:t/>
+              <a:t>まず、この授業のゴールです。
+ひとことで言うと、「動くものを作れる」から、「チームで安全に届け続けられる」へ、ステップアップすることです。
+一つ目は作る。ネクストジェイエスとリアクトで、トゥードゥーアプリを作ります。
+二つ目は確かめる。ジェストとテスティングライブラリーで、自動テストを書きます。
+三つ目は自動化する。ギットハブアクションズで、リント、テスト、ビルドを自動で回します。
+四つ目は届ける。バーセルとギットハブページズに、自動で公開します。
+最終的には、プッシュするだけで、テストに通ったものだけが公開される仕組みを、自分の手で作ります。</a:t>
             </a:r>
             <a:endParaRPr lang="en-US" dirty="0"/>
           </a:p>
@@ -1648,7 +1705,12 @@
           <a:p>
             <a:r>
               <a:rPr lang="en-US" dirty="0"/>
-              <a:t/>
+              <a:t>フェーズ4の用語、一つ目は、公開まわりの言葉です。
+デプロイは、フランス語の「広げる」という言葉が語源です。軍隊を各地に配備する、という意味を経て、ソフトを使える場所に置く、という意味になりました。
+ユーアールエルは、ユニフォーム・リソース・ロケーター。ウェブ上の住所のことです。
+スタティック、静的は「動かない、固定の」という意味です。
+ベースパスは土台となる道、トレーリングスラッシュは、後ろに続くスラッシュという意味です。ギットハブページズで公開するときに設定します。
+アーティファクトは「成果物」。ラテン語の、技で作られたもの、が語源です。</a:t>
             </a:r>
             <a:endParaRPr lang="en-US" dirty="0"/>
           </a:p>
@@ -1736,7 +1798,13 @@
           <a:p>
             <a:r>
               <a:rPr lang="en-US" dirty="0"/>
-              <a:t/>
+              <a:t>フェーズ4の用語、二つ目は、運用とチーム開発の言葉です。
+パイプラインは、石油やガスを順に送る管のことです。リント、テスト、ビルド、公開を、一本につないで順に流すしくみです。
+プロダクションは本番、プレビューは前もって見る、という意味です。
+リバートは「元に戻す」。
+イシューは「問題、論点」。やることやバグを登録する機能です。
+レビューは「もう一度見る」。ほかの人のコードを見て意見を書きます。
+コンフリクトは「衝突」。二人が同じ行を変えたときに起きます。</a:t>
             </a:r>
             <a:endParaRPr lang="en-US" dirty="0"/>
           </a:p>
@@ -1824,7 +1892,11 @@
           <a:p>
             <a:r>
               <a:rPr lang="en-US" dirty="0"/>
-              <a:t/>
+              <a:t>フェーズ5は、個人制作です。ここまで学んだことを、全部つなげます。
+コマ26で企画と設計、27で実装、28でテストとシーアイシーディーを仕上げ、29で発表の準備、30で最終発表です。
+たとえば、ポモドーロタイマーのようなアプリを、ネクストジェイエスで作り、テストを書き、シーアイを回して、公開ユーアールエルで発表します。
+ちなみに、ポモドーロはイタリア語で「トマト」という意味です。トマトの形のキッチンタイマーで、二十五分集中する勉強法が由来です。
+リードミーのユーアールエルを開けば動く、プルリクエストにチェックマークが付いている、という状態が完成形です。</a:t>
             </a:r>
             <a:endParaRPr lang="en-US" dirty="0"/>
           </a:p>
@@ -1912,7 +1984,13 @@
           <a:p>
             <a:r>
               <a:rPr lang="en-US" dirty="0"/>
-              <a:t/>
+              <a:t>発展編は任意の教材です。全部で六コマあります。
+エーワンは、タイプスクリプト。型とジャバスクリプトを合わせた名前で、値の型を決めて、間違いを早く見つけます。
+エーツーは、テイルウィンド・シーエスエス。テイルウィンドは「追い風」という意味です。
+エースリーは、エムエスダブリュー、モック・サービス・ワーカーで、にせものの通信相手を作ります。
+エーフォーは、プレイライト。「劇作家」という意味で、台本どおりにブラウザを操作するテストを書きます。
+エーファイブはシーアイの強化、エーシックスは、ポケモン図鑑を題材にした総合演習です。
+興味のある順に、自由に取り組んでください。</a:t>
             </a:r>
             <a:endParaRPr lang="en-US" dirty="0"/>
           </a:p>
@@ -2000,7 +2078,14 @@
           <a:p>
             <a:r>
               <a:rPr lang="en-US" dirty="0"/>
-              <a:t/>
+              <a:t>最後に、授業の進め方とお願いです。
+毎回の授業は、導入、本題、演習、まとめ、課題の順に進みます。本題では、先生と一緒にコマンドを打っていきます。
+うまくいくコツをいくつか紹介します。
+エラーが出たら、まず全文を読んでください。質問するときは、そのまま貼り付けてくれると助かります。
+コピーアンドペーストより、手で打つほうが身につきます。
+小さくコミットして、こまめにプッシュしましょう。
+知らない略語が出てきたら、元の英語を調べると覚えやすくなります。
+休んでしまったときは、教材を一コマ分読めば、追いつけるようになっています。</a:t>
             </a:r>
             <a:endParaRPr lang="en-US" dirty="0"/>
           </a:p>
@@ -2088,7 +2173,10 @@
           <a:p>
             <a:r>
               <a:rPr lang="en-US" dirty="0"/>
-              <a:t/>
+              <a:t>このあとは、コマ1の環境構築です。
+ノードジェイエス、ギット、ブイエスコードをそろえて、ネクストジェイエスのプロジェクトを動かしてみます。
+パソコンと、ギットハブのアカウントを準備しておいてください。
+それでは、これから一緒に頑張っていきましょう。</a:t>
             </a:r>
             <a:endParaRPr lang="en-US" dirty="0"/>
           </a:p>
@@ -2176,7 +2264,10 @@
           <a:p>
             <a:r>
               <a:rPr lang="en-US" dirty="0"/>
-              <a:t/>
+              <a:t>では、シーアイシーディーとは何でしょうか。
+上の図を見てください。コードを書いて、ギットハブにプッシュすると、自動でチェックが走り、通ったら自動で公開され、誰でも見られるユーアールエルになります。
+左下は、これを手作業でやった場合です。テストを忘れたまま入れてしまったり、人によって確認の手順がバラバラだったり、公開のたびにミスが起きたりします。「自分のパソコンでは動いたのに」というのもよくある話です。
+右下のように、シーアイシーディーがあれば、毎回同じ手順で自動チェックされ、失敗したらマージできず、通ったものだけが公開されます。誰がやっても同じ結果になる、というのが大きなポイントです。</a:t>
             </a:r>
             <a:endParaRPr lang="en-US" dirty="0"/>
           </a:p>
@@ -2264,7 +2355,10 @@
           <a:p>
             <a:r>
               <a:rPr lang="en-US" dirty="0"/>
-              <a:t/>
+              <a:t>シーアイシーディーという略語を、英語から分解してみましょう。
+シーアイは、コンティニュアス・インテグレーション。コンティニュアスは「継続的な、途切れない」という意味で、たまにやるのではなく、変更のたびに毎回やる、ということです。インテグレーションは「統合」。ラテン語のインテジャー、ひとかたまりの、という言葉が語源で、みんなの変更をこまめにメインに合流させて、壊れていないかを確かめます。
+シーディーには二つの意味があります。デリバリーは「配達」で、いつでも本番に出せる状態まで自動で用意し、最後の公開は人が決めます。デプロイメントは「配備、展開」で、テストに通ったら公開まで全部自動です。この授業で作るのは、デプロイメントのほうです。
+ちなみに、シーアイという言葉は、千九百九十年代に、エクストリーム・プログラミングという開発手法で広まりました。</a:t>
             </a:r>
             <a:endParaRPr lang="en-US" dirty="0"/>
           </a:p>
@@ -2352,7 +2446,15 @@
           <a:p>
             <a:r>
               <a:rPr lang="en-US" dirty="0"/>
-              <a:t/>
+              <a:t>次に、授業全体の流れです。本編が三十コマ、発展編が六コマあります。
+フェーズという言葉は、英語で「段階」という意味です。
+フェーズ1は、コマ1から7。ネクストジェイエスでリアクトの基礎を復習します。
+フェーズ2は、コマ8から13。テストを学びます。
+フェーズ3は、コマ14から19。ギットハブアクションズで、自動チェックを作ります。
+フェーズ4は、コマ20から25。シーアイシーディーとデプロイ、つまり自動公開です。
+フェーズ5は、コマ26から30。個人制作をして、最後に発表します。
+右側の発展編は任意です。興味のあるものから取り組んでください。
+毎回の授業は九十分で、導入、本題、演習、まとめ、課題の順に進みます。</a:t>
             </a:r>
             <a:endParaRPr lang="en-US" dirty="0"/>
           </a:p>
@@ -2440,7 +2542,13 @@
           <a:p>
             <a:r>
               <a:rPr lang="en-US" dirty="0"/>
-              <a:t/>
+              <a:t>この授業で使う道具と、開発環境です。
+パソコンはウィンドウズで、コマンドはすべてパワーシェルで打ちます。
+ノードジェイエスは、バージョン24のエルティーエス版を、ウィングェットというコマンドで入れます。
+エディタはブイエスコードを使い、改行コードをエルエフに設定します。
+ギットはギット・フォー・ウィンドウズを入れて、オートシーアールエルエフという設定をオフにします。
+ほかに、ギットハブとバーセルのアカウントを使います。
+作業フォルダは、ワンドライブの同期の外に作ります。セットアップは、コマ1でみんなと一緒にやるので、安心してください。</a:t>
             </a:r>
             <a:endParaRPr lang="en-US" dirty="0"/>
           </a:p>
@@ -2528,7 +2636,13 @@
           <a:p>
             <a:r>
               <a:rPr lang="en-US" dirty="0"/>
-              <a:t/>
+              <a:t>ここからは、略語とその語源を紹介していきます。まずは環境の用語です。
+エルティーエスは、ロング・ターム・サポート、長期サポートの略です。ノードジェイエスは偶数番号の版がエルティーエスになり、約二年半、修正が続きます。授業の途中でサポートが切れないので、これを使います。
+ウィングェットは、ウィンドウズと、手に入れるという意味のゲットを合わせた名前です。
+ブイエスコードは、ビジュアル・スタジオ・コードの略です。
+エルエフとシーアールエルエフは、タイプライターが語源です。エルエフは紙を一行送る、シーアールは印字の位置を左端に戻す動きのことです。ウィンドウズとそれ以外で改行の書き方が違うので、全員エルエフにそろえます。
+エヌピーエムは、ノード・パッケージ・マネージャーとして生まれましたが、今の公式サイトは、冗談めかして「略語ではない」と言っています。
+パワーシェルのシェルは「殻」という意味で、人とオーエスの間に立って命令を受け取るソフトのことです。</a:t>
             </a:r>
             <a:endParaRPr lang="en-US" dirty="0"/>
           </a:p>
@@ -2616,7 +2730,12 @@
           <a:p>
             <a:r>
               <a:rPr lang="en-US" dirty="0"/>
-              <a:t/>
+              <a:t>ここから、各フェーズの中身を見ていきます。フェーズ1は、リアクトを学び直すところからです。
+触ったことがある前提で、あいまいなところを固め直します。
+ジェイエスエックスとプロップスで部品を組み立て、ステートとイベントで画面を動かします。ユーズクライアントという、この部品はブラウザで動かす、という宣言の意味もここで押さえます。
+リストと条件表示では、マップやキー、三項演算子をおさらいします。
+そして、トゥードゥーアプリを作り、ギットとギットハブ、プルリクエストの流れを身につけます。
+ここで作ったトゥードゥーアプリを、フェーズ2から4で、テストし、自動化し、公開していきます。</a:t>
             </a:r>
             <a:endParaRPr lang="en-US" dirty="0"/>
           </a:p>
@@ -2704,7 +2823,13 @@
           <a:p>
             <a:r>
               <a:rPr lang="en-US" dirty="0"/>
-              <a:t/>
+              <a:t>フェーズ1の用語です。
+ジェイエスエックスは、ジャバスクリプト・エックスエムエルの略とされています。エックスエムエルは、拡張できるマークアップ言語のことで、ジャバスクリプトの中に、エイチティーエムエルのようなタグを書ける書き方です。
+プロップスは、プロパティーズの略で、性質や属性という意味です。親の部品から子の部品へ渡す値のことです。
+ステートは英語で「状態」。画面の中で変わる値です。
+トゥードゥーは「やるべきこと」。
+ギットは略語ではありません。リナックスの作者、リーナス・トーバルズが二千五年に作ったもので、イギリスの俗語で「まぬけ」という意味です。ギットハブのハブは、車輪の中心という意味です。
+ピーアールは、プルリクエスト。「私の変更を引き込んでください」というお願いです。</a:t>
             </a:r>
             <a:endParaRPr lang="en-US" dirty="0"/>
           </a:p>
@@ -3383,7 +3508,7 @@
       </p:sp>
       <p:sp>
         <p:nvSpPr>
-          <p:cNvPr id="3" name="Text 0"/>
+          <p:cNvPr id="4" name="Text 0"/>
           <p:cNvSpPr/>
           <p:nvPr>
             <p:ph idx="101" type="body" hasCustomPrompt="1"/>
@@ -3498,7 +3623,7 @@
       </p:sp>
       <p:sp>
         <p:nvSpPr>
-          <p:cNvPr id="3" name="Shape 1"/>
+          <p:cNvPr id="4" name="Shape 1"/>
           <p:cNvSpPr/>
           <p:nvPr/>
         </p:nvSpPr>
@@ -3525,7 +3650,7 @@
       </p:sp>
       <p:sp>
         <p:nvSpPr>
-          <p:cNvPr id="4" name="Text 2"/>
+          <p:cNvPr id="5" name="Text 2"/>
           <p:cNvSpPr txBox="1"/>
           <p:nvPr/>
         </p:nvSpPr>
@@ -3632,7 +3757,7 @@
       </p:sp>
       <p:sp>
         <p:nvSpPr>
-          <p:cNvPr id="5" name="Shape 3"/>
+          <p:cNvPr id="6" name="Shape 3"/>
           <p:cNvSpPr/>
           <p:nvPr/>
         </p:nvSpPr>
@@ -3659,7 +3784,7 @@
       </p:sp>
       <p:sp>
         <p:nvSpPr>
-          <p:cNvPr id="6" name="Text 4"/>
+          <p:cNvPr id="7" name="Text 4"/>
           <p:cNvSpPr txBox="1"/>
           <p:nvPr/>
         </p:nvSpPr>
@@ -3695,7 +3820,7 @@
       </p:sp>
       <p:sp>
         <p:nvSpPr>
-          <p:cNvPr id="7" name="Shape 5"/>
+          <p:cNvPr id="8" name="Shape 5"/>
           <p:cNvSpPr/>
           <p:nvPr/>
         </p:nvSpPr>
@@ -3722,7 +3847,7 @@
       </p:sp>
       <p:sp>
         <p:nvSpPr>
-          <p:cNvPr id="8" name="Text 6"/>
+          <p:cNvPr id="9" name="Text 6"/>
           <p:cNvSpPr txBox="1"/>
           <p:nvPr/>
         </p:nvSpPr>
@@ -3758,7 +3883,7 @@
       </p:sp>
       <p:sp>
         <p:nvSpPr>
-          <p:cNvPr id="9" name="Shape 7"/>
+          <p:cNvPr id="10" name="Shape 7"/>
           <p:cNvSpPr/>
           <p:nvPr/>
         </p:nvSpPr>
@@ -3785,7 +3910,7 @@
       </p:sp>
       <p:sp>
         <p:nvSpPr>
-          <p:cNvPr id="10" name="Text 8"/>
+          <p:cNvPr id="11" name="Text 8"/>
           <p:cNvSpPr txBox="1"/>
           <p:nvPr/>
         </p:nvSpPr>
@@ -3821,7 +3946,7 @@
       </p:sp>
       <p:sp>
         <p:nvSpPr>
-          <p:cNvPr id="11" name="Text 9"/>
+          <p:cNvPr id="12" name="Text 9"/>
           <p:cNvSpPr txBox="1"/>
           <p:nvPr/>
         </p:nvSpPr>
@@ -3871,7 +3996,7 @@
       </p:sp>
       <p:sp>
         <p:nvSpPr>
-          <p:cNvPr id="12" name="Text 10"/>
+          <p:cNvPr id="13" name="Text 10"/>
           <p:cNvSpPr txBox="1"/>
           <p:nvPr/>
         </p:nvSpPr>
@@ -3921,7 +4046,7 @@
       </p:sp>
       <p:sp>
         <p:nvSpPr>
-          <p:cNvPr id="13" name="Text 11"/>
+          <p:cNvPr id="14" name="Text 11"/>
           <p:cNvSpPr txBox="1"/>
           <p:nvPr/>
         </p:nvSpPr>
@@ -3971,7 +4096,7 @@
       </p:sp>
       <p:sp>
         <p:nvSpPr>
-          <p:cNvPr id="14" name="Text 12"/>
+          <p:cNvPr id="15" name="Text 12"/>
           <p:cNvSpPr txBox="1"/>
           <p:nvPr/>
         </p:nvSpPr>
@@ -7067,7 +7192,7 @@
       </p:sp>
       <p:sp>
         <p:nvSpPr>
-          <p:cNvPr id="3" name="Shape 1"/>
+          <p:cNvPr id="4" name="Shape 1"/>
           <p:cNvSpPr/>
           <p:nvPr/>
         </p:nvSpPr>
@@ -7094,7 +7219,7 @@
       </p:sp>
       <p:sp>
         <p:nvSpPr>
-          <p:cNvPr id="4" name="Text 2"/>
+          <p:cNvPr id="5" name="Text 2"/>
           <p:cNvSpPr txBox="1"/>
           <p:nvPr/>
         </p:nvSpPr>
@@ -7130,7 +7255,7 @@
       </p:sp>
       <p:sp>
         <p:nvSpPr>
-          <p:cNvPr id="5" name="Shape 3"/>
+          <p:cNvPr id="6" name="Shape 3"/>
           <p:cNvSpPr/>
           <p:nvPr/>
         </p:nvSpPr>
@@ -7155,7 +7280,7 @@
       </p:sp>
       <p:sp>
         <p:nvSpPr>
-          <p:cNvPr id="6" name="Shape 4"/>
+          <p:cNvPr id="7" name="Shape 4"/>
           <p:cNvSpPr/>
           <p:nvPr/>
         </p:nvSpPr>
@@ -7182,7 +7307,7 @@
       </p:sp>
       <p:sp>
         <p:nvSpPr>
-          <p:cNvPr id="7" name="Text 5"/>
+          <p:cNvPr id="8" name="Text 5"/>
           <p:cNvSpPr txBox="1"/>
           <p:nvPr/>
         </p:nvSpPr>
@@ -7218,7 +7343,7 @@
       </p:sp>
       <p:sp>
         <p:nvSpPr>
-          <p:cNvPr id="8" name="Shape 6"/>
+          <p:cNvPr id="9" name="Shape 6"/>
           <p:cNvSpPr/>
           <p:nvPr/>
         </p:nvSpPr>
@@ -7245,7 +7370,7 @@
       </p:sp>
       <p:sp>
         <p:nvSpPr>
-          <p:cNvPr id="9" name="Text 7"/>
+          <p:cNvPr id="10" name="Text 7"/>
           <p:cNvSpPr txBox="1"/>
           <p:nvPr/>
         </p:nvSpPr>
@@ -7351,7 +7476,7 @@
       </p:sp>
       <p:sp>
         <p:nvSpPr>
-          <p:cNvPr id="10" name="Shape 8"/>
+          <p:cNvPr id="11" name="Shape 8"/>
           <p:cNvSpPr/>
           <p:nvPr/>
         </p:nvSpPr>
@@ -7378,7 +7503,7 @@
       </p:sp>
       <p:sp>
         <p:nvSpPr>
-          <p:cNvPr id="11" name="Text 9"/>
+          <p:cNvPr id="12" name="Text 9"/>
           <p:cNvSpPr txBox="1"/>
           <p:nvPr/>
         </p:nvSpPr>
@@ -7484,7 +7609,7 @@
       </p:sp>
       <p:sp>
         <p:nvSpPr>
-          <p:cNvPr id="12" name="Shape 10"/>
+          <p:cNvPr id="13" name="Shape 10"/>
           <p:cNvSpPr/>
           <p:nvPr/>
         </p:nvSpPr>
@@ -7511,7 +7636,7 @@
       </p:sp>
       <p:sp>
         <p:nvSpPr>
-          <p:cNvPr id="13" name="Text 11"/>
+          <p:cNvPr id="14" name="Text 11"/>
           <p:cNvSpPr txBox="1"/>
           <p:nvPr/>
         </p:nvSpPr>
@@ -7617,7 +7742,7 @@
       </p:sp>
       <p:sp>
         <p:nvSpPr>
-          <p:cNvPr id="14" name="Text 12"/>
+          <p:cNvPr id="15" name="Text 12"/>
           <p:cNvSpPr txBox="1"/>
           <p:nvPr/>
         </p:nvSpPr>
@@ -7653,7 +7778,7 @@
       </p:sp>
       <p:sp>
         <p:nvSpPr>
-          <p:cNvPr id="15" name="Text 13"/>
+          <p:cNvPr id="16" name="Text 13"/>
           <p:cNvSpPr txBox="1"/>
           <p:nvPr/>
         </p:nvSpPr>
@@ -7689,7 +7814,7 @@
       </p:sp>
       <p:sp>
         <p:nvSpPr>
-          <p:cNvPr id="16" name="Shape 14"/>
+          <p:cNvPr id="17" name="Shape 14"/>
           <p:cNvSpPr/>
           <p:nvPr/>
         </p:nvSpPr>
@@ -7716,7 +7841,7 @@
       </p:sp>
       <p:sp>
         <p:nvSpPr>
-          <p:cNvPr id="17" name="Text 15"/>
+          <p:cNvPr id="18" name="Text 15"/>
           <p:cNvSpPr txBox="1"/>
           <p:nvPr/>
         </p:nvSpPr>
@@ -12440,7 +12565,7 @@
       </p:sp>
       <p:sp>
         <p:nvSpPr>
-          <p:cNvPr id="3" name="Shape 1"/>
+          <p:cNvPr id="4" name="Shape 1"/>
           <p:cNvSpPr/>
           <p:nvPr/>
         </p:nvSpPr>
@@ -12467,7 +12592,7 @@
       </p:sp>
       <p:sp>
         <p:nvSpPr>
-          <p:cNvPr id="4" name="Text 2"/>
+          <p:cNvPr id="5" name="Text 2"/>
           <p:cNvSpPr txBox="1"/>
           <p:nvPr/>
         </p:nvSpPr>
@@ -12523,7 +12648,7 @@
       </p:sp>
       <p:sp>
         <p:nvSpPr>
-          <p:cNvPr id="5" name="Shape 3"/>
+          <p:cNvPr id="6" name="Shape 3"/>
           <p:cNvSpPr/>
           <p:nvPr/>
         </p:nvSpPr>
@@ -12550,7 +12675,7 @@
       </p:sp>
       <p:sp>
         <p:nvSpPr>
-          <p:cNvPr id="6" name="Text 4"/>
+          <p:cNvPr id="7" name="Text 4"/>
           <p:cNvSpPr txBox="1"/>
           <p:nvPr/>
         </p:nvSpPr>
@@ -12606,7 +12731,7 @@
       </p:sp>
       <p:sp>
         <p:nvSpPr>
-          <p:cNvPr id="7" name="Shape 5"/>
+          <p:cNvPr id="8" name="Shape 5"/>
           <p:cNvSpPr/>
           <p:nvPr/>
         </p:nvSpPr>
@@ -12633,7 +12758,7 @@
       </p:sp>
       <p:sp>
         <p:nvSpPr>
-          <p:cNvPr id="8" name="Text 6"/>
+          <p:cNvPr id="9" name="Text 6"/>
           <p:cNvSpPr txBox="1"/>
           <p:nvPr/>
         </p:nvSpPr>
@@ -12740,7 +12865,7 @@
       </p:sp>
       <p:sp>
         <p:nvSpPr>
-          <p:cNvPr id="9" name="Shape 7"/>
+          <p:cNvPr id="10" name="Shape 7"/>
           <p:cNvSpPr/>
           <p:nvPr/>
         </p:nvSpPr>
@@ -12767,7 +12892,7 @@
       </p:sp>
       <p:sp>
         <p:nvSpPr>
-          <p:cNvPr id="10" name="Text 8"/>
+          <p:cNvPr id="11" name="Text 8"/>
           <p:cNvSpPr txBox="1"/>
           <p:nvPr/>
         </p:nvSpPr>
@@ -12874,7 +12999,7 @@
       </p:sp>
       <p:sp>
         <p:nvSpPr>
-          <p:cNvPr id="11" name="Text 9"/>
+          <p:cNvPr id="12" name="Text 9"/>
           <p:cNvSpPr txBox="1"/>
           <p:nvPr/>
         </p:nvSpPr>
@@ -13018,7 +13143,7 @@
       </p:sp>
       <p:sp>
         <p:nvSpPr>
-          <p:cNvPr id="3" name="Text 1"/>
+          <p:cNvPr id="4" name="Text 1"/>
           <p:cNvSpPr txBox="1"/>
           <p:nvPr/>
         </p:nvSpPr>
@@ -13054,7 +13179,7 @@
       </p:sp>
       <p:sp>
         <p:nvSpPr>
-          <p:cNvPr id="4" name="Shape 2"/>
+          <p:cNvPr id="5" name="Shape 2"/>
           <p:cNvSpPr/>
           <p:nvPr/>
         </p:nvSpPr>
@@ -13081,7 +13206,7 @@
       </p:sp>
       <p:sp>
         <p:nvSpPr>
-          <p:cNvPr id="5" name="Text 3"/>
+          <p:cNvPr id="6" name="Text 3"/>
           <p:cNvSpPr txBox="1"/>
           <p:nvPr/>
         </p:nvSpPr>
@@ -13117,7 +13242,7 @@
       </p:sp>
       <p:sp>
         <p:nvSpPr>
-          <p:cNvPr id="6" name="Shape 4"/>
+          <p:cNvPr id="7" name="Shape 4"/>
           <p:cNvSpPr/>
           <p:nvPr/>
         </p:nvSpPr>
@@ -13142,7 +13267,7 @@
       </p:sp>
       <p:sp>
         <p:nvSpPr>
-          <p:cNvPr id="7" name="Shape 5"/>
+          <p:cNvPr id="8" name="Shape 5"/>
           <p:cNvSpPr/>
           <p:nvPr/>
         </p:nvSpPr>
@@ -13169,7 +13294,7 @@
       </p:sp>
       <p:sp>
         <p:nvSpPr>
-          <p:cNvPr id="8" name="Text 6"/>
+          <p:cNvPr id="9" name="Text 6"/>
           <p:cNvSpPr txBox="1"/>
           <p:nvPr/>
         </p:nvSpPr>
@@ -13205,7 +13330,7 @@
       </p:sp>
       <p:sp>
         <p:nvSpPr>
-          <p:cNvPr id="9" name="Shape 7"/>
+          <p:cNvPr id="10" name="Shape 7"/>
           <p:cNvSpPr/>
           <p:nvPr/>
         </p:nvSpPr>
@@ -13230,7 +13355,7 @@
       </p:sp>
       <p:sp>
         <p:nvSpPr>
-          <p:cNvPr id="10" name="Shape 8"/>
+          <p:cNvPr id="11" name="Shape 8"/>
           <p:cNvSpPr/>
           <p:nvPr/>
         </p:nvSpPr>
@@ -13257,7 +13382,7 @@
       </p:sp>
       <p:sp>
         <p:nvSpPr>
-          <p:cNvPr id="11" name="Text 9"/>
+          <p:cNvPr id="12" name="Text 9"/>
           <p:cNvSpPr txBox="1"/>
           <p:nvPr/>
         </p:nvSpPr>
@@ -13293,7 +13418,7 @@
       </p:sp>
       <p:sp>
         <p:nvSpPr>
-          <p:cNvPr id="12" name="Shape 10"/>
+          <p:cNvPr id="13" name="Shape 10"/>
           <p:cNvSpPr/>
           <p:nvPr/>
         </p:nvSpPr>
@@ -13318,7 +13443,7 @@
       </p:sp>
       <p:sp>
         <p:nvSpPr>
-          <p:cNvPr id="13" name="Shape 11"/>
+          <p:cNvPr id="14" name="Shape 11"/>
           <p:cNvSpPr/>
           <p:nvPr/>
         </p:nvSpPr>
@@ -13345,7 +13470,7 @@
       </p:sp>
       <p:sp>
         <p:nvSpPr>
-          <p:cNvPr id="14" name="Text 12"/>
+          <p:cNvPr id="15" name="Text 12"/>
           <p:cNvSpPr txBox="1"/>
           <p:nvPr/>
         </p:nvSpPr>
@@ -13395,7 +13520,7 @@
       </p:sp>
       <p:sp>
         <p:nvSpPr>
-          <p:cNvPr id="15" name="Shape 13"/>
+          <p:cNvPr id="16" name="Shape 13"/>
           <p:cNvSpPr/>
           <p:nvPr/>
         </p:nvSpPr>
@@ -13420,7 +13545,7 @@
       </p:sp>
       <p:sp>
         <p:nvSpPr>
-          <p:cNvPr id="16" name="Shape 14"/>
+          <p:cNvPr id="17" name="Shape 14"/>
           <p:cNvSpPr/>
           <p:nvPr/>
         </p:nvSpPr>
@@ -13447,7 +13572,7 @@
       </p:sp>
       <p:sp>
         <p:nvSpPr>
-          <p:cNvPr id="17" name="Text 15"/>
+          <p:cNvPr id="18" name="Text 15"/>
           <p:cNvSpPr txBox="1"/>
           <p:nvPr/>
         </p:nvSpPr>
@@ -13483,7 +13608,7 @@
       </p:sp>
       <p:sp>
         <p:nvSpPr>
-          <p:cNvPr id="18" name="Text 16"/>
+          <p:cNvPr id="19" name="Text 16"/>
           <p:cNvSpPr txBox="1"/>
           <p:nvPr/>
         </p:nvSpPr>
@@ -13519,7 +13644,7 @@
       </p:sp>
       <p:sp>
         <p:nvSpPr>
-          <p:cNvPr id="19" name="Shape 17"/>
+          <p:cNvPr id="20" name="Shape 17"/>
           <p:cNvSpPr/>
           <p:nvPr/>
         </p:nvSpPr>
@@ -13546,7 +13671,7 @@
       </p:sp>
       <p:sp>
         <p:nvSpPr>
-          <p:cNvPr id="20" name="Text 18"/>
+          <p:cNvPr id="21" name="Text 18"/>
           <p:cNvSpPr txBox="1"/>
           <p:nvPr/>
         </p:nvSpPr>
@@ -13582,7 +13707,7 @@
       </p:sp>
       <p:sp>
         <p:nvSpPr>
-          <p:cNvPr id="21" name="Shape 19"/>
+          <p:cNvPr id="22" name="Shape 19"/>
           <p:cNvSpPr/>
           <p:nvPr/>
         </p:nvSpPr>
@@ -13607,7 +13732,7 @@
       </p:sp>
       <p:sp>
         <p:nvSpPr>
-          <p:cNvPr id="22" name="Shape 20"/>
+          <p:cNvPr id="23" name="Shape 20"/>
           <p:cNvSpPr/>
           <p:nvPr/>
         </p:nvSpPr>
@@ -13634,7 +13759,7 @@
       </p:sp>
       <p:sp>
         <p:nvSpPr>
-          <p:cNvPr id="23" name="Text 21"/>
+          <p:cNvPr id="24" name="Text 21"/>
           <p:cNvSpPr txBox="1"/>
           <p:nvPr/>
         </p:nvSpPr>
@@ -13670,7 +13795,7 @@
       </p:sp>
       <p:sp>
         <p:nvSpPr>
-          <p:cNvPr id="24" name="Shape 22"/>
+          <p:cNvPr id="25" name="Shape 22"/>
           <p:cNvSpPr/>
           <p:nvPr/>
         </p:nvSpPr>
@@ -13695,7 +13820,7 @@
       </p:sp>
       <p:sp>
         <p:nvSpPr>
-          <p:cNvPr id="25" name="Shape 23"/>
+          <p:cNvPr id="26" name="Shape 23"/>
           <p:cNvSpPr/>
           <p:nvPr/>
         </p:nvSpPr>
@@ -13722,7 +13847,7 @@
       </p:sp>
       <p:sp>
         <p:nvSpPr>
-          <p:cNvPr id="26" name="Text 24"/>
+          <p:cNvPr id="27" name="Text 24"/>
           <p:cNvSpPr txBox="1"/>
           <p:nvPr/>
         </p:nvSpPr>
@@ -13758,7 +13883,7 @@
       </p:sp>
       <p:sp>
         <p:nvSpPr>
-          <p:cNvPr id="27" name="Shape 25"/>
+          <p:cNvPr id="28" name="Shape 25"/>
           <p:cNvSpPr/>
           <p:nvPr/>
         </p:nvSpPr>
@@ -13783,7 +13908,7 @@
       </p:sp>
       <p:sp>
         <p:nvSpPr>
-          <p:cNvPr id="28" name="Shape 26"/>
+          <p:cNvPr id="29" name="Shape 26"/>
           <p:cNvSpPr/>
           <p:nvPr/>
         </p:nvSpPr>
@@ -13810,7 +13935,7 @@
       </p:sp>
       <p:sp>
         <p:nvSpPr>
-          <p:cNvPr id="29" name="Text 27"/>
+          <p:cNvPr id="30" name="Text 27"/>
           <p:cNvSpPr txBox="1"/>
           <p:nvPr/>
         </p:nvSpPr>
@@ -13860,7 +13985,7 @@
       </p:sp>
       <p:sp>
         <p:nvSpPr>
-          <p:cNvPr id="30" name="Shape 28"/>
+          <p:cNvPr id="31" name="Shape 28"/>
           <p:cNvSpPr/>
           <p:nvPr/>
         </p:nvSpPr>
@@ -13885,7 +14010,7 @@
       </p:sp>
       <p:sp>
         <p:nvSpPr>
-          <p:cNvPr id="31" name="Shape 29"/>
+          <p:cNvPr id="32" name="Shape 29"/>
           <p:cNvSpPr/>
           <p:nvPr/>
         </p:nvSpPr>
@@ -13912,7 +14037,7 @@
       </p:sp>
       <p:sp>
         <p:nvSpPr>
-          <p:cNvPr id="32" name="Text 30"/>
+          <p:cNvPr id="33" name="Text 30"/>
           <p:cNvSpPr txBox="1"/>
           <p:nvPr/>
         </p:nvSpPr>
@@ -13962,7 +14087,7 @@
       </p:sp>
       <p:sp>
         <p:nvSpPr>
-          <p:cNvPr id="33" name="Shape 31"/>
+          <p:cNvPr id="34" name="Shape 31"/>
           <p:cNvSpPr/>
           <p:nvPr/>
         </p:nvSpPr>
@@ -13989,7 +14114,7 @@
       </p:sp>
       <p:sp>
         <p:nvSpPr>
-          <p:cNvPr id="34" name="Text 32"/>
+          <p:cNvPr id="35" name="Text 32"/>
           <p:cNvSpPr txBox="1"/>
           <p:nvPr/>
         </p:nvSpPr>
@@ -15587,7 +15712,7 @@
       </p:sp>
       <p:sp>
         <p:nvSpPr>
-          <p:cNvPr id="3" name="Text 1"/>
+          <p:cNvPr id="4" name="Text 1"/>
           <p:cNvSpPr txBox="1"/>
           <p:nvPr/>
         </p:nvSpPr>
@@ -15623,7 +15748,7 @@
       </p:sp>
       <p:sp>
         <p:nvSpPr>
-          <p:cNvPr id="4" name="Shape 2"/>
+          <p:cNvPr id="5" name="Shape 2"/>
           <p:cNvSpPr/>
           <p:nvPr/>
         </p:nvSpPr>
@@ -15648,7 +15773,7 @@
       </p:sp>
       <p:sp>
         <p:nvSpPr>
-          <p:cNvPr id="5" name="Text 3"/>
+          <p:cNvPr id="6" name="Text 3"/>
           <p:cNvSpPr txBox="1"/>
           <p:nvPr/>
         </p:nvSpPr>
@@ -15684,7 +15809,7 @@
       </p:sp>
       <p:sp>
         <p:nvSpPr>
-          <p:cNvPr id="6" name="Shape 4"/>
+          <p:cNvPr id="7" name="Shape 4"/>
           <p:cNvSpPr/>
           <p:nvPr/>
         </p:nvSpPr>
@@ -15711,7 +15836,7 @@
       </p:sp>
       <p:sp>
         <p:nvSpPr>
-          <p:cNvPr id="7" name="Text 5"/>
+          <p:cNvPr id="8" name="Text 5"/>
           <p:cNvSpPr txBox="1"/>
           <p:nvPr/>
         </p:nvSpPr>
@@ -15784,7 +15909,7 @@
       </p:sp>
       <p:sp>
         <p:nvSpPr>
-          <p:cNvPr id="8" name="Shape 6"/>
+          <p:cNvPr id="9" name="Shape 6"/>
           <p:cNvSpPr/>
           <p:nvPr/>
         </p:nvSpPr>
@@ -15809,7 +15934,7 @@
       </p:sp>
       <p:sp>
         <p:nvSpPr>
-          <p:cNvPr id="9" name="Text 7"/>
+          <p:cNvPr id="10" name="Text 7"/>
           <p:cNvSpPr txBox="1"/>
           <p:nvPr/>
         </p:nvSpPr>
@@ -15845,7 +15970,7 @@
       </p:sp>
       <p:sp>
         <p:nvSpPr>
-          <p:cNvPr id="10" name="Shape 8"/>
+          <p:cNvPr id="11" name="Shape 8"/>
           <p:cNvSpPr/>
           <p:nvPr/>
         </p:nvSpPr>
@@ -15872,7 +15997,7 @@
       </p:sp>
       <p:sp>
         <p:nvSpPr>
-          <p:cNvPr id="11" name="Text 9"/>
+          <p:cNvPr id="12" name="Text 9"/>
           <p:cNvSpPr txBox="1"/>
           <p:nvPr/>
         </p:nvSpPr>
@@ -15945,7 +16070,7 @@
       </p:sp>
       <p:sp>
         <p:nvSpPr>
-          <p:cNvPr id="12" name="Shape 10"/>
+          <p:cNvPr id="13" name="Shape 10"/>
           <p:cNvSpPr/>
           <p:nvPr/>
         </p:nvSpPr>
@@ -15970,7 +16095,7 @@
       </p:sp>
       <p:sp>
         <p:nvSpPr>
-          <p:cNvPr id="13" name="Text 11"/>
+          <p:cNvPr id="14" name="Text 11"/>
           <p:cNvSpPr txBox="1"/>
           <p:nvPr/>
         </p:nvSpPr>
@@ -16006,7 +16131,7 @@
       </p:sp>
       <p:sp>
         <p:nvSpPr>
-          <p:cNvPr id="14" name="Shape 12"/>
+          <p:cNvPr id="15" name="Shape 12"/>
           <p:cNvSpPr/>
           <p:nvPr/>
         </p:nvSpPr>
@@ -16033,7 +16158,7 @@
       </p:sp>
       <p:sp>
         <p:nvSpPr>
-          <p:cNvPr id="15" name="Text 13"/>
+          <p:cNvPr id="16" name="Text 13"/>
           <p:cNvSpPr txBox="1"/>
           <p:nvPr/>
         </p:nvSpPr>
@@ -16123,7 +16248,7 @@
       </p:sp>
       <p:sp>
         <p:nvSpPr>
-          <p:cNvPr id="16" name="Shape 14"/>
+          <p:cNvPr id="17" name="Shape 14"/>
           <p:cNvSpPr/>
           <p:nvPr/>
         </p:nvSpPr>
@@ -16148,7 +16273,7 @@
       </p:sp>
       <p:sp>
         <p:nvSpPr>
-          <p:cNvPr id="17" name="Text 15"/>
+          <p:cNvPr id="18" name="Text 15"/>
           <p:cNvSpPr txBox="1"/>
           <p:nvPr/>
         </p:nvSpPr>
@@ -16184,7 +16309,7 @@
       </p:sp>
       <p:sp>
         <p:nvSpPr>
-          <p:cNvPr id="18" name="Shape 16"/>
+          <p:cNvPr id="19" name="Shape 16"/>
           <p:cNvSpPr/>
           <p:nvPr/>
         </p:nvSpPr>
@@ -16211,7 +16336,7 @@
       </p:sp>
       <p:sp>
         <p:nvSpPr>
-          <p:cNvPr id="19" name="Text 17"/>
+          <p:cNvPr id="20" name="Text 17"/>
           <p:cNvSpPr txBox="1"/>
           <p:nvPr/>
         </p:nvSpPr>
@@ -16284,7 +16409,7 @@
       </p:sp>
       <p:sp>
         <p:nvSpPr>
-          <p:cNvPr id="20" name="Text 18"/>
+          <p:cNvPr id="21" name="Text 18"/>
           <p:cNvSpPr txBox="1"/>
           <p:nvPr/>
         </p:nvSpPr>
@@ -19265,7 +19390,7 @@
       </p:sp>
       <p:sp>
         <p:nvSpPr>
-          <p:cNvPr id="3" name="Shape 1"/>
+          <p:cNvPr id="4" name="Shape 1"/>
           <p:cNvSpPr/>
           <p:nvPr/>
         </p:nvSpPr>
@@ -19290,7 +19415,7 @@
       </p:sp>
       <p:sp>
         <p:nvSpPr>
-          <p:cNvPr id="4" name="Text 2"/>
+          <p:cNvPr id="5" name="Text 2"/>
           <p:cNvSpPr txBox="1"/>
           <p:nvPr/>
         </p:nvSpPr>
@@ -19326,7 +19451,7 @@
       </p:sp>
       <p:sp>
         <p:nvSpPr>
-          <p:cNvPr id="5" name="Text 3"/>
+          <p:cNvPr id="6" name="Text 3"/>
           <p:cNvSpPr txBox="1"/>
           <p:nvPr/>
         </p:nvSpPr>
@@ -19362,7 +19487,7 @@
       </p:sp>
       <p:sp>
         <p:nvSpPr>
-          <p:cNvPr id="6" name="Shape 4"/>
+          <p:cNvPr id="7" name="Shape 4"/>
           <p:cNvSpPr/>
           <p:nvPr/>
         </p:nvSpPr>
@@ -19387,7 +19512,7 @@
       </p:sp>
       <p:sp>
         <p:nvSpPr>
-          <p:cNvPr id="7" name="Text 5"/>
+          <p:cNvPr id="8" name="Text 5"/>
           <p:cNvSpPr txBox="1"/>
           <p:nvPr/>
         </p:nvSpPr>
@@ -19423,7 +19548,7 @@
       </p:sp>
       <p:sp>
         <p:nvSpPr>
-          <p:cNvPr id="8" name="Text 6"/>
+          <p:cNvPr id="9" name="Text 6"/>
           <p:cNvSpPr txBox="1"/>
           <p:nvPr/>
         </p:nvSpPr>
@@ -19459,7 +19584,7 @@
       </p:sp>
       <p:sp>
         <p:nvSpPr>
-          <p:cNvPr id="9" name="Shape 7"/>
+          <p:cNvPr id="10" name="Shape 7"/>
           <p:cNvSpPr/>
           <p:nvPr/>
         </p:nvSpPr>
@@ -19484,7 +19609,7 @@
       </p:sp>
       <p:sp>
         <p:nvSpPr>
-          <p:cNvPr id="10" name="Text 8"/>
+          <p:cNvPr id="11" name="Text 8"/>
           <p:cNvSpPr txBox="1"/>
           <p:nvPr/>
         </p:nvSpPr>
@@ -19520,7 +19645,7 @@
       </p:sp>
       <p:sp>
         <p:nvSpPr>
-          <p:cNvPr id="11" name="Text 9"/>
+          <p:cNvPr id="12" name="Text 9"/>
           <p:cNvSpPr txBox="1"/>
           <p:nvPr/>
         </p:nvSpPr>
@@ -19556,7 +19681,7 @@
       </p:sp>
       <p:sp>
         <p:nvSpPr>
-          <p:cNvPr id="12" name="Shape 10"/>
+          <p:cNvPr id="13" name="Shape 10"/>
           <p:cNvSpPr/>
           <p:nvPr/>
         </p:nvSpPr>
@@ -19581,7 +19706,7 @@
       </p:sp>
       <p:sp>
         <p:nvSpPr>
-          <p:cNvPr id="13" name="Text 11"/>
+          <p:cNvPr id="14" name="Text 11"/>
           <p:cNvSpPr txBox="1"/>
           <p:nvPr/>
         </p:nvSpPr>
@@ -19617,7 +19742,7 @@
       </p:sp>
       <p:sp>
         <p:nvSpPr>
-          <p:cNvPr id="14" name="Text 12"/>
+          <p:cNvPr id="15" name="Text 12"/>
           <p:cNvSpPr txBox="1"/>
           <p:nvPr/>
         </p:nvSpPr>
@@ -19653,7 +19778,7 @@
       </p:sp>
       <p:sp>
         <p:nvSpPr>
-          <p:cNvPr id="15" name="Shape 13"/>
+          <p:cNvPr id="16" name="Shape 13"/>
           <p:cNvSpPr/>
           <p:nvPr/>
         </p:nvSpPr>
@@ -19678,7 +19803,7 @@
       </p:sp>
       <p:sp>
         <p:nvSpPr>
-          <p:cNvPr id="16" name="Text 14"/>
+          <p:cNvPr id="17" name="Text 14"/>
           <p:cNvSpPr txBox="1"/>
           <p:nvPr/>
         </p:nvSpPr>
@@ -19714,7 +19839,7 @@
       </p:sp>
       <p:sp>
         <p:nvSpPr>
-          <p:cNvPr id="17" name="Text 15"/>
+          <p:cNvPr id="18" name="Text 15"/>
           <p:cNvSpPr txBox="1"/>
           <p:nvPr/>
         </p:nvSpPr>
@@ -19750,7 +19875,7 @@
       </p:sp>
       <p:sp>
         <p:nvSpPr>
-          <p:cNvPr id="18" name="Shape 16"/>
+          <p:cNvPr id="19" name="Shape 16"/>
           <p:cNvSpPr/>
           <p:nvPr/>
         </p:nvSpPr>
@@ -19777,7 +19902,7 @@
       </p:sp>
       <p:sp>
         <p:nvSpPr>
-          <p:cNvPr id="19" name="Text 17"/>
+          <p:cNvPr id="20" name="Text 17"/>
           <p:cNvSpPr txBox="1"/>
           <p:nvPr/>
         </p:nvSpPr>
@@ -21493,7 +21618,7 @@
       </p:sp>
       <p:sp>
         <p:nvSpPr>
-          <p:cNvPr id="3" name="Shape 1"/>
+          <p:cNvPr id="4" name="Shape 1"/>
           <p:cNvSpPr/>
           <p:nvPr/>
         </p:nvSpPr>
@@ -21520,7 +21645,7 @@
       </p:sp>
       <p:sp>
         <p:nvSpPr>
-          <p:cNvPr id="4" name="Text 2"/>
+          <p:cNvPr id="5" name="Text 2"/>
           <p:cNvSpPr txBox="1"/>
           <p:nvPr/>
         </p:nvSpPr>
@@ -21644,7 +21769,7 @@
       </p:sp>
       <p:sp>
         <p:nvSpPr>
-          <p:cNvPr id="5" name="Shape 3"/>
+          <p:cNvPr id="6" name="Shape 3"/>
           <p:cNvSpPr/>
           <p:nvPr/>
         </p:nvSpPr>
@@ -21671,7 +21796,7 @@
       </p:sp>
       <p:sp>
         <p:nvSpPr>
-          <p:cNvPr id="6" name="Text 4"/>
+          <p:cNvPr id="7" name="Text 4"/>
           <p:cNvSpPr txBox="1"/>
           <p:nvPr/>
         </p:nvSpPr>
@@ -21895,7 +22020,7 @@
                   <a:srgbClr val="FFFFFF"/>
                 </a:solidFill>
               </a:rPr>
-              <a:t>次回：コマ1 環境構築</a:t>
+              <a:t>この後は：コマ1 環境構築</a:t>
             </a:r>
             <a:endParaRPr lang="en-US" sz="4400" dirty="0"/>
           </a:p>
@@ -21903,7 +22028,7 @@
       </p:sp>
       <p:sp>
         <p:nvSpPr>
-          <p:cNvPr id="3" name="Text 0"/>
+          <p:cNvPr id="4" name="Text 0"/>
           <p:cNvSpPr/>
           <p:nvPr>
             <p:ph idx="101" type="body" hasCustomPrompt="1"/>
@@ -22018,7 +22143,7 @@
       </p:sp>
       <p:sp>
         <p:nvSpPr>
-          <p:cNvPr id="3" name="Shape 1"/>
+          <p:cNvPr id="4" name="Shape 1"/>
           <p:cNvSpPr/>
           <p:nvPr/>
         </p:nvSpPr>
@@ -22045,7 +22170,7 @@
       </p:sp>
       <p:sp>
         <p:nvSpPr>
-          <p:cNvPr id="4" name="Text 2"/>
+          <p:cNvPr id="5" name="Text 2"/>
           <p:cNvSpPr txBox="1"/>
           <p:nvPr/>
         </p:nvSpPr>
@@ -22095,7 +22220,7 @@
       </p:sp>
       <p:sp>
         <p:nvSpPr>
-          <p:cNvPr id="5" name="Shape 3"/>
+          <p:cNvPr id="6" name="Shape 3"/>
           <p:cNvSpPr/>
           <p:nvPr/>
         </p:nvSpPr>
@@ -22120,7 +22245,7 @@
       </p:sp>
       <p:sp>
         <p:nvSpPr>
-          <p:cNvPr id="6" name="Shape 4"/>
+          <p:cNvPr id="7" name="Shape 4"/>
           <p:cNvSpPr/>
           <p:nvPr/>
         </p:nvSpPr>
@@ -22147,7 +22272,7 @@
       </p:sp>
       <p:sp>
         <p:nvSpPr>
-          <p:cNvPr id="7" name="Text 5"/>
+          <p:cNvPr id="8" name="Text 5"/>
           <p:cNvSpPr txBox="1"/>
           <p:nvPr/>
         </p:nvSpPr>
@@ -22197,7 +22322,7 @@
       </p:sp>
       <p:sp>
         <p:nvSpPr>
-          <p:cNvPr id="8" name="Shape 6"/>
+          <p:cNvPr id="9" name="Shape 6"/>
           <p:cNvSpPr/>
           <p:nvPr/>
         </p:nvSpPr>
@@ -22222,7 +22347,7 @@
       </p:sp>
       <p:sp>
         <p:nvSpPr>
-          <p:cNvPr id="9" name="Shape 7"/>
+          <p:cNvPr id="10" name="Shape 7"/>
           <p:cNvSpPr/>
           <p:nvPr/>
         </p:nvSpPr>
@@ -22249,7 +22374,7 @@
       </p:sp>
       <p:sp>
         <p:nvSpPr>
-          <p:cNvPr id="10" name="Text 8"/>
+          <p:cNvPr id="11" name="Text 8"/>
           <p:cNvSpPr txBox="1"/>
           <p:nvPr/>
         </p:nvSpPr>
@@ -22299,7 +22424,7 @@
       </p:sp>
       <p:sp>
         <p:nvSpPr>
-          <p:cNvPr id="11" name="Shape 9"/>
+          <p:cNvPr id="12" name="Shape 9"/>
           <p:cNvSpPr/>
           <p:nvPr/>
         </p:nvSpPr>
@@ -22324,7 +22449,7 @@
       </p:sp>
       <p:sp>
         <p:nvSpPr>
-          <p:cNvPr id="12" name="Shape 10"/>
+          <p:cNvPr id="13" name="Shape 10"/>
           <p:cNvSpPr/>
           <p:nvPr/>
         </p:nvSpPr>
@@ -22351,7 +22476,7 @@
       </p:sp>
       <p:sp>
         <p:nvSpPr>
-          <p:cNvPr id="13" name="Text 11"/>
+          <p:cNvPr id="14" name="Text 11"/>
           <p:cNvSpPr txBox="1"/>
           <p:nvPr/>
         </p:nvSpPr>
@@ -22401,7 +22526,7 @@
       </p:sp>
       <p:sp>
         <p:nvSpPr>
-          <p:cNvPr id="14" name="Shape 12"/>
+          <p:cNvPr id="15" name="Shape 12"/>
           <p:cNvSpPr/>
           <p:nvPr/>
         </p:nvSpPr>
@@ -22426,7 +22551,7 @@
       </p:sp>
       <p:sp>
         <p:nvSpPr>
-          <p:cNvPr id="15" name="Shape 13"/>
+          <p:cNvPr id="16" name="Shape 13"/>
           <p:cNvSpPr/>
           <p:nvPr/>
         </p:nvSpPr>
@@ -22453,7 +22578,7 @@
       </p:sp>
       <p:sp>
         <p:nvSpPr>
-          <p:cNvPr id="16" name="Text 14"/>
+          <p:cNvPr id="17" name="Text 14"/>
           <p:cNvSpPr txBox="1"/>
           <p:nvPr/>
         </p:nvSpPr>
@@ -22503,7 +22628,7 @@
       </p:sp>
       <p:sp>
         <p:nvSpPr>
-          <p:cNvPr id="17" name="Shape 15"/>
+          <p:cNvPr id="18" name="Shape 15"/>
           <p:cNvSpPr/>
           <p:nvPr/>
         </p:nvSpPr>
@@ -22530,7 +22655,7 @@
       </p:sp>
       <p:sp>
         <p:nvSpPr>
-          <p:cNvPr id="18" name="Text 16"/>
+          <p:cNvPr id="19" name="Text 16"/>
           <p:cNvSpPr txBox="1"/>
           <p:nvPr/>
         </p:nvSpPr>
@@ -22637,7 +22762,7 @@
       </p:sp>
       <p:sp>
         <p:nvSpPr>
-          <p:cNvPr id="19" name="Shape 17"/>
+          <p:cNvPr id="20" name="Shape 17"/>
           <p:cNvSpPr/>
           <p:nvPr/>
         </p:nvSpPr>
@@ -22664,7 +22789,7 @@
       </p:sp>
       <p:sp>
         <p:nvSpPr>
-          <p:cNvPr id="20" name="Text 18"/>
+          <p:cNvPr id="21" name="Text 18"/>
           <p:cNvSpPr txBox="1"/>
           <p:nvPr/>
         </p:nvSpPr>
@@ -22879,7 +23004,7 @@
       </p:sp>
       <p:sp>
         <p:nvSpPr>
-          <p:cNvPr id="3" name="Shape 1"/>
+          <p:cNvPr id="4" name="Shape 1"/>
           <p:cNvSpPr/>
           <p:nvPr/>
         </p:nvSpPr>
@@ -22904,7 +23029,7 @@
       </p:sp>
       <p:sp>
         <p:nvSpPr>
-          <p:cNvPr id="4" name="Text 2"/>
+          <p:cNvPr id="5" name="Text 2"/>
           <p:cNvSpPr txBox="1"/>
           <p:nvPr/>
         </p:nvSpPr>
@@ -22940,7 +23065,7 @@
       </p:sp>
       <p:sp>
         <p:nvSpPr>
-          <p:cNvPr id="5" name="Shape 3"/>
+          <p:cNvPr id="6" name="Shape 3"/>
           <p:cNvSpPr/>
           <p:nvPr/>
         </p:nvSpPr>
@@ -22965,7 +23090,7 @@
       </p:sp>
       <p:sp>
         <p:nvSpPr>
-          <p:cNvPr id="6" name="Text 4"/>
+          <p:cNvPr id="7" name="Text 4"/>
           <p:cNvSpPr txBox="1"/>
           <p:nvPr/>
         </p:nvSpPr>
@@ -23001,7 +23126,7 @@
       </p:sp>
       <p:sp>
         <p:nvSpPr>
-          <p:cNvPr id="7" name="Shape 5"/>
+          <p:cNvPr id="8" name="Shape 5"/>
           <p:cNvSpPr/>
           <p:nvPr/>
         </p:nvSpPr>
@@ -23028,7 +23153,7 @@
       </p:sp>
       <p:sp>
         <p:nvSpPr>
-          <p:cNvPr id="8" name="Text 6"/>
+          <p:cNvPr id="9" name="Text 6"/>
           <p:cNvSpPr txBox="1"/>
           <p:nvPr/>
         </p:nvSpPr>
@@ -23084,7 +23209,7 @@
       </p:sp>
       <p:sp>
         <p:nvSpPr>
-          <p:cNvPr id="9" name="Shape 7"/>
+          <p:cNvPr id="10" name="Shape 7"/>
           <p:cNvSpPr/>
           <p:nvPr/>
         </p:nvSpPr>
@@ -23111,7 +23236,7 @@
       </p:sp>
       <p:sp>
         <p:nvSpPr>
-          <p:cNvPr id="10" name="Text 8"/>
+          <p:cNvPr id="11" name="Text 8"/>
           <p:cNvSpPr txBox="1"/>
           <p:nvPr/>
         </p:nvSpPr>
@@ -23167,7 +23292,7 @@
       </p:sp>
       <p:sp>
         <p:nvSpPr>
-          <p:cNvPr id="11" name="Shape 9"/>
+          <p:cNvPr id="12" name="Shape 9"/>
           <p:cNvSpPr/>
           <p:nvPr/>
         </p:nvSpPr>
@@ -23194,7 +23319,7 @@
       </p:sp>
       <p:sp>
         <p:nvSpPr>
-          <p:cNvPr id="12" name="Text 10"/>
+          <p:cNvPr id="13" name="Text 10"/>
           <p:cNvSpPr txBox="1"/>
           <p:nvPr/>
         </p:nvSpPr>
@@ -23250,7 +23375,7 @@
       </p:sp>
       <p:sp>
         <p:nvSpPr>
-          <p:cNvPr id="13" name="Shape 11"/>
+          <p:cNvPr id="14" name="Shape 11"/>
           <p:cNvSpPr/>
           <p:nvPr/>
         </p:nvSpPr>
@@ -23277,7 +23402,7 @@
       </p:sp>
       <p:sp>
         <p:nvSpPr>
-          <p:cNvPr id="14" name="Text 12"/>
+          <p:cNvPr id="15" name="Text 12"/>
           <p:cNvSpPr txBox="1"/>
           <p:nvPr/>
         </p:nvSpPr>
@@ -23333,7 +23458,7 @@
       </p:sp>
       <p:sp>
         <p:nvSpPr>
-          <p:cNvPr id="15" name="Text 13"/>
+          <p:cNvPr id="16" name="Text 13"/>
           <p:cNvSpPr txBox="1"/>
           <p:nvPr/>
         </p:nvSpPr>
@@ -23477,7 +23602,7 @@
       </p:sp>
       <p:sp>
         <p:nvSpPr>
-          <p:cNvPr id="3" name="Shape 1"/>
+          <p:cNvPr id="4" name="Shape 1"/>
           <p:cNvSpPr/>
           <p:nvPr/>
         </p:nvSpPr>
@@ -23504,7 +23629,7 @@
       </p:sp>
       <p:sp>
         <p:nvSpPr>
-          <p:cNvPr id="4" name="Text 2"/>
+          <p:cNvPr id="5" name="Text 2"/>
           <p:cNvSpPr txBox="1"/>
           <p:nvPr/>
         </p:nvSpPr>
@@ -23554,7 +23679,7 @@
       </p:sp>
       <p:sp>
         <p:nvSpPr>
-          <p:cNvPr id="5" name="Text 3"/>
+          <p:cNvPr id="6" name="Text 3"/>
           <p:cNvSpPr txBox="1"/>
           <p:nvPr/>
         </p:nvSpPr>
@@ -23590,7 +23715,7 @@
       </p:sp>
       <p:sp>
         <p:nvSpPr>
-          <p:cNvPr id="6" name="Shape 4"/>
+          <p:cNvPr id="7" name="Shape 4"/>
           <p:cNvSpPr/>
           <p:nvPr/>
         </p:nvSpPr>
@@ -23617,7 +23742,7 @@
       </p:sp>
       <p:sp>
         <p:nvSpPr>
-          <p:cNvPr id="7" name="Text 5"/>
+          <p:cNvPr id="8" name="Text 5"/>
           <p:cNvSpPr txBox="1"/>
           <p:nvPr/>
         </p:nvSpPr>
@@ -23667,7 +23792,7 @@
       </p:sp>
       <p:sp>
         <p:nvSpPr>
-          <p:cNvPr id="8" name="Text 6"/>
+          <p:cNvPr id="9" name="Text 6"/>
           <p:cNvSpPr txBox="1"/>
           <p:nvPr/>
         </p:nvSpPr>
@@ -23703,7 +23828,7 @@
       </p:sp>
       <p:sp>
         <p:nvSpPr>
-          <p:cNvPr id="9" name="Shape 7"/>
+          <p:cNvPr id="10" name="Shape 7"/>
           <p:cNvSpPr/>
           <p:nvPr/>
         </p:nvSpPr>
@@ -23730,7 +23855,7 @@
       </p:sp>
       <p:sp>
         <p:nvSpPr>
-          <p:cNvPr id="10" name="Text 8"/>
+          <p:cNvPr id="11" name="Text 8"/>
           <p:cNvSpPr txBox="1"/>
           <p:nvPr/>
         </p:nvSpPr>
@@ -23780,7 +23905,7 @@
       </p:sp>
       <p:sp>
         <p:nvSpPr>
-          <p:cNvPr id="11" name="Text 9"/>
+          <p:cNvPr id="12" name="Text 9"/>
           <p:cNvSpPr txBox="1"/>
           <p:nvPr/>
         </p:nvSpPr>
@@ -23816,7 +23941,7 @@
       </p:sp>
       <p:sp>
         <p:nvSpPr>
-          <p:cNvPr id="12" name="Shape 10"/>
+          <p:cNvPr id="13" name="Shape 10"/>
           <p:cNvSpPr/>
           <p:nvPr/>
         </p:nvSpPr>
@@ -23843,7 +23968,7 @@
       </p:sp>
       <p:sp>
         <p:nvSpPr>
-          <p:cNvPr id="13" name="Text 11"/>
+          <p:cNvPr id="14" name="Text 11"/>
           <p:cNvSpPr txBox="1"/>
           <p:nvPr/>
         </p:nvSpPr>
@@ -23893,7 +24018,7 @@
       </p:sp>
       <p:sp>
         <p:nvSpPr>
-          <p:cNvPr id="14" name="Text 12"/>
+          <p:cNvPr id="15" name="Text 12"/>
           <p:cNvSpPr txBox="1"/>
           <p:nvPr/>
         </p:nvSpPr>
@@ -23929,7 +24054,7 @@
       </p:sp>
       <p:sp>
         <p:nvSpPr>
-          <p:cNvPr id="15" name="Shape 13"/>
+          <p:cNvPr id="16" name="Shape 13"/>
           <p:cNvSpPr/>
           <p:nvPr/>
         </p:nvSpPr>
@@ -23956,7 +24081,7 @@
       </p:sp>
       <p:sp>
         <p:nvSpPr>
-          <p:cNvPr id="16" name="Text 14"/>
+          <p:cNvPr id="17" name="Text 14"/>
           <p:cNvSpPr txBox="1"/>
           <p:nvPr/>
         </p:nvSpPr>
@@ -24006,7 +24131,7 @@
       </p:sp>
       <p:sp>
         <p:nvSpPr>
-          <p:cNvPr id="17" name="Text 15"/>
+          <p:cNvPr id="18" name="Text 15"/>
           <p:cNvSpPr txBox="1"/>
           <p:nvPr/>
         </p:nvSpPr>
@@ -24042,7 +24167,7 @@
       </p:sp>
       <p:sp>
         <p:nvSpPr>
-          <p:cNvPr id="18" name="Shape 16"/>
+          <p:cNvPr id="19" name="Shape 16"/>
           <p:cNvSpPr/>
           <p:nvPr/>
         </p:nvSpPr>
@@ -24069,7 +24194,7 @@
       </p:sp>
       <p:sp>
         <p:nvSpPr>
-          <p:cNvPr id="19" name="Text 17"/>
+          <p:cNvPr id="20" name="Text 17"/>
           <p:cNvSpPr txBox="1"/>
           <p:nvPr/>
         </p:nvSpPr>
@@ -24210,7 +24335,7 @@
       </p:sp>
       <p:sp>
         <p:nvSpPr>
-          <p:cNvPr id="20" name="Text 18"/>
+          <p:cNvPr id="21" name="Text 18"/>
           <p:cNvSpPr txBox="1"/>
           <p:nvPr/>
         </p:nvSpPr>
@@ -24354,7 +24479,7 @@
       </p:sp>
       <p:sp>
         <p:nvSpPr>
-          <p:cNvPr id="3" name="Shape 1"/>
+          <p:cNvPr id="4" name="Shape 1"/>
           <p:cNvSpPr/>
           <p:nvPr/>
         </p:nvSpPr>
@@ -24381,7 +24506,7 @@
       </p:sp>
       <p:sp>
         <p:nvSpPr>
-          <p:cNvPr id="4" name="Text 2"/>
+          <p:cNvPr id="5" name="Text 2"/>
           <p:cNvSpPr txBox="1"/>
           <p:nvPr/>
         </p:nvSpPr>
@@ -24437,7 +24562,7 @@
       </p:sp>
       <p:sp>
         <p:nvSpPr>
-          <p:cNvPr id="5" name="Shape 3"/>
+          <p:cNvPr id="6" name="Shape 3"/>
           <p:cNvSpPr/>
           <p:nvPr/>
         </p:nvSpPr>
@@ -24464,7 +24589,7 @@
       </p:sp>
       <p:sp>
         <p:nvSpPr>
-          <p:cNvPr id="6" name="Text 4"/>
+          <p:cNvPr id="7" name="Text 4"/>
           <p:cNvSpPr txBox="1"/>
           <p:nvPr/>
         </p:nvSpPr>
@@ -24520,7 +24645,7 @@
       </p:sp>
       <p:sp>
         <p:nvSpPr>
-          <p:cNvPr id="7" name="Shape 5"/>
+          <p:cNvPr id="8" name="Shape 5"/>
           <p:cNvSpPr/>
           <p:nvPr/>
         </p:nvSpPr>
@@ -24547,7 +24672,7 @@
       </p:sp>
       <p:sp>
         <p:nvSpPr>
-          <p:cNvPr id="8" name="Text 6"/>
+          <p:cNvPr id="9" name="Text 6"/>
           <p:cNvSpPr txBox="1"/>
           <p:nvPr/>
         </p:nvSpPr>
@@ -24603,7 +24728,7 @@
       </p:sp>
       <p:sp>
         <p:nvSpPr>
-          <p:cNvPr id="9" name="Shape 7"/>
+          <p:cNvPr id="10" name="Shape 7"/>
           <p:cNvSpPr/>
           <p:nvPr/>
         </p:nvSpPr>
@@ -24630,7 +24755,7 @@
       </p:sp>
       <p:sp>
         <p:nvSpPr>
-          <p:cNvPr id="10" name="Text 8"/>
+          <p:cNvPr id="11" name="Text 8"/>
           <p:cNvSpPr txBox="1"/>
           <p:nvPr/>
         </p:nvSpPr>
@@ -24686,7 +24811,7 @@
       </p:sp>
       <p:sp>
         <p:nvSpPr>
-          <p:cNvPr id="11" name="Shape 9"/>
+          <p:cNvPr id="12" name="Shape 9"/>
           <p:cNvSpPr/>
           <p:nvPr/>
         </p:nvSpPr>
@@ -24713,7 +24838,7 @@
       </p:sp>
       <p:sp>
         <p:nvSpPr>
-          <p:cNvPr id="12" name="Text 10"/>
+          <p:cNvPr id="13" name="Text 10"/>
           <p:cNvSpPr txBox="1"/>
           <p:nvPr/>
         </p:nvSpPr>
@@ -24769,7 +24894,7 @@
       </p:sp>
       <p:sp>
         <p:nvSpPr>
-          <p:cNvPr id="13" name="Shape 11"/>
+          <p:cNvPr id="14" name="Shape 11"/>
           <p:cNvSpPr/>
           <p:nvPr/>
         </p:nvSpPr>
@@ -24796,7 +24921,7 @@
       </p:sp>
       <p:sp>
         <p:nvSpPr>
-          <p:cNvPr id="14" name="Text 12"/>
+          <p:cNvPr id="15" name="Text 12"/>
           <p:cNvSpPr txBox="1"/>
           <p:nvPr/>
         </p:nvSpPr>
@@ -24852,7 +24977,7 @@
       </p:sp>
       <p:sp>
         <p:nvSpPr>
-          <p:cNvPr id="15" name="Text 13"/>
+          <p:cNvPr id="16" name="Text 13"/>
           <p:cNvSpPr txBox="1"/>
           <p:nvPr/>
         </p:nvSpPr>
@@ -26514,7 +26639,7 @@
       </p:sp>
       <p:sp>
         <p:nvSpPr>
-          <p:cNvPr id="3" name="Text 1"/>
+          <p:cNvPr id="4" name="Text 1"/>
           <p:cNvSpPr txBox="1"/>
           <p:nvPr/>
         </p:nvSpPr>
@@ -26550,7 +26675,7 @@
       </p:sp>
       <p:sp>
         <p:nvSpPr>
-          <p:cNvPr id="4" name="Shape 2"/>
+          <p:cNvPr id="5" name="Shape 2"/>
           <p:cNvSpPr/>
           <p:nvPr/>
         </p:nvSpPr>
@@ -26577,7 +26702,7 @@
       </p:sp>
       <p:sp>
         <p:nvSpPr>
-          <p:cNvPr id="5" name="Text 3"/>
+          <p:cNvPr id="6" name="Text 3"/>
           <p:cNvSpPr txBox="1"/>
           <p:nvPr/>
         </p:nvSpPr>
@@ -26633,7 +26758,7 @@
       </p:sp>
       <p:sp>
         <p:nvSpPr>
-          <p:cNvPr id="6" name="Shape 4"/>
+          <p:cNvPr id="7" name="Shape 4"/>
           <p:cNvSpPr/>
           <p:nvPr/>
         </p:nvSpPr>
@@ -26660,7 +26785,7 @@
       </p:sp>
       <p:sp>
         <p:nvSpPr>
-          <p:cNvPr id="7" name="Text 5"/>
+          <p:cNvPr id="8" name="Text 5"/>
           <p:cNvSpPr txBox="1"/>
           <p:nvPr/>
         </p:nvSpPr>
@@ -26716,7 +26841,7 @@
       </p:sp>
       <p:sp>
         <p:nvSpPr>
-          <p:cNvPr id="8" name="Shape 6"/>
+          <p:cNvPr id="9" name="Shape 6"/>
           <p:cNvSpPr/>
           <p:nvPr/>
         </p:nvSpPr>
@@ -26743,7 +26868,7 @@
       </p:sp>
       <p:sp>
         <p:nvSpPr>
-          <p:cNvPr id="9" name="Text 7"/>
+          <p:cNvPr id="10" name="Text 7"/>
           <p:cNvSpPr txBox="1"/>
           <p:nvPr/>
         </p:nvSpPr>
@@ -26799,7 +26924,7 @@
       </p:sp>
       <p:sp>
         <p:nvSpPr>
-          <p:cNvPr id="10" name="Shape 8"/>
+          <p:cNvPr id="11" name="Shape 8"/>
           <p:cNvSpPr/>
           <p:nvPr/>
         </p:nvSpPr>
@@ -26826,7 +26951,7 @@
       </p:sp>
       <p:sp>
         <p:nvSpPr>
-          <p:cNvPr id="11" name="Text 9"/>
+          <p:cNvPr id="12" name="Text 9"/>
           <p:cNvSpPr txBox="1"/>
           <p:nvPr/>
         </p:nvSpPr>
@@ -26882,7 +27007,7 @@
       </p:sp>
       <p:sp>
         <p:nvSpPr>
-          <p:cNvPr id="12" name="Shape 10"/>
+          <p:cNvPr id="13" name="Shape 10"/>
           <p:cNvSpPr/>
           <p:nvPr/>
         </p:nvSpPr>
@@ -26909,7 +27034,7 @@
       </p:sp>
       <p:sp>
         <p:nvSpPr>
-          <p:cNvPr id="13" name="Text 11"/>
+          <p:cNvPr id="14" name="Text 11"/>
           <p:cNvSpPr txBox="1"/>
           <p:nvPr/>
         </p:nvSpPr>
@@ -26965,7 +27090,7 @@
       </p:sp>
       <p:sp>
         <p:nvSpPr>
-          <p:cNvPr id="14" name="Text 12"/>
+          <p:cNvPr id="15" name="Text 12"/>
           <p:cNvSpPr txBox="1"/>
           <p:nvPr/>
         </p:nvSpPr>
